--- a/Novosibirsk_State_University/Английский язык/7 семестр/Homework/Smart device characteristics.pptx
+++ b/Novosibirsk_State_University/Английский язык/7 семестр/Homework/Smart device characteristics.pptx
@@ -6,10 +6,12 @@
   </p:sldMasterIdLst>
   <p:sldIdLst>
     <p:sldId id="256" r:id="rId2"/>
-    <p:sldId id="257" r:id="rId3"/>
-    <p:sldId id="259" r:id="rId4"/>
-    <p:sldId id="258" r:id="rId5"/>
-    <p:sldId id="260" r:id="rId6"/>
+    <p:sldId id="263" r:id="rId3"/>
+    <p:sldId id="257" r:id="rId4"/>
+    <p:sldId id="259" r:id="rId5"/>
+    <p:sldId id="258" r:id="rId6"/>
+    <p:sldId id="261" r:id="rId7"/>
+    <p:sldId id="260" r:id="rId8"/>
   </p:sldIdLst>
   <p:sldSz cx="12192000" cy="6858000"/>
   <p:notesSz cx="6858000" cy="9144000"/>
@@ -108,6 +110,11 @@
       </a:defRPr>
     </a:lvl9pPr>
   </p:defaultTextStyle>
+  <p:extLst>
+    <p:ext uri="{EFAFB233-063F-42B5-8137-9DF3F51BA10A}">
+      <p15:sldGuideLst xmlns:p15="http://schemas.microsoft.com/office/powerpoint/2012/main"/>
+    </p:ext>
+  </p:extLst>
 </p:presentation>
 </file>
 
@@ -258,7 +265,7 @@
           <a:p>
             <a:fld id="{25FC0E31-009B-47AB-ABD1-AC671ABAD126}" type="datetimeFigureOut">
               <a:rPr lang="ru-RU" smtClean="0"/>
-              <a:t>12.09.2025</a:t>
+              <a:t>19.12.2025</a:t>
             </a:fld>
             <a:endParaRPr lang="ru-RU"/>
           </a:p>
@@ -456,7 +463,7 @@
           <a:p>
             <a:fld id="{25FC0E31-009B-47AB-ABD1-AC671ABAD126}" type="datetimeFigureOut">
               <a:rPr lang="ru-RU" smtClean="0"/>
-              <a:t>12.09.2025</a:t>
+              <a:t>19.12.2025</a:t>
             </a:fld>
             <a:endParaRPr lang="ru-RU"/>
           </a:p>
@@ -664,7 +671,7 @@
           <a:p>
             <a:fld id="{25FC0E31-009B-47AB-ABD1-AC671ABAD126}" type="datetimeFigureOut">
               <a:rPr lang="ru-RU" smtClean="0"/>
-              <a:t>12.09.2025</a:t>
+              <a:t>19.12.2025</a:t>
             </a:fld>
             <a:endParaRPr lang="ru-RU"/>
           </a:p>
@@ -862,7 +869,7 @@
           <a:p>
             <a:fld id="{25FC0E31-009B-47AB-ABD1-AC671ABAD126}" type="datetimeFigureOut">
               <a:rPr lang="ru-RU" smtClean="0"/>
-              <a:t>12.09.2025</a:t>
+              <a:t>19.12.2025</a:t>
             </a:fld>
             <a:endParaRPr lang="ru-RU"/>
           </a:p>
@@ -1137,7 +1144,7 @@
           <a:p>
             <a:fld id="{25FC0E31-009B-47AB-ABD1-AC671ABAD126}" type="datetimeFigureOut">
               <a:rPr lang="ru-RU" smtClean="0"/>
-              <a:t>12.09.2025</a:t>
+              <a:t>19.12.2025</a:t>
             </a:fld>
             <a:endParaRPr lang="ru-RU"/>
           </a:p>
@@ -1402,7 +1409,7 @@
           <a:p>
             <a:fld id="{25FC0E31-009B-47AB-ABD1-AC671ABAD126}" type="datetimeFigureOut">
               <a:rPr lang="ru-RU" smtClean="0"/>
-              <a:t>12.09.2025</a:t>
+              <a:t>19.12.2025</a:t>
             </a:fld>
             <a:endParaRPr lang="ru-RU"/>
           </a:p>
@@ -1814,7 +1821,7 @@
           <a:p>
             <a:fld id="{25FC0E31-009B-47AB-ABD1-AC671ABAD126}" type="datetimeFigureOut">
               <a:rPr lang="ru-RU" smtClean="0"/>
-              <a:t>12.09.2025</a:t>
+              <a:t>19.12.2025</a:t>
             </a:fld>
             <a:endParaRPr lang="ru-RU"/>
           </a:p>
@@ -1955,7 +1962,7 @@
           <a:p>
             <a:fld id="{25FC0E31-009B-47AB-ABD1-AC671ABAD126}" type="datetimeFigureOut">
               <a:rPr lang="ru-RU" smtClean="0"/>
-              <a:t>12.09.2025</a:t>
+              <a:t>19.12.2025</a:t>
             </a:fld>
             <a:endParaRPr lang="ru-RU"/>
           </a:p>
@@ -2068,7 +2075,7 @@
           <a:p>
             <a:fld id="{25FC0E31-009B-47AB-ABD1-AC671ABAD126}" type="datetimeFigureOut">
               <a:rPr lang="ru-RU" smtClean="0"/>
-              <a:t>12.09.2025</a:t>
+              <a:t>19.12.2025</a:t>
             </a:fld>
             <a:endParaRPr lang="ru-RU"/>
           </a:p>
@@ -2379,7 +2386,7 @@
           <a:p>
             <a:fld id="{25FC0E31-009B-47AB-ABD1-AC671ABAD126}" type="datetimeFigureOut">
               <a:rPr lang="ru-RU" smtClean="0"/>
-              <a:t>12.09.2025</a:t>
+              <a:t>19.12.2025</a:t>
             </a:fld>
             <a:endParaRPr lang="ru-RU"/>
           </a:p>
@@ -2667,7 +2674,7 @@
           <a:p>
             <a:fld id="{25FC0E31-009B-47AB-ABD1-AC671ABAD126}" type="datetimeFigureOut">
               <a:rPr lang="ru-RU" smtClean="0"/>
-              <a:t>12.09.2025</a:t>
+              <a:t>19.12.2025</a:t>
             </a:fld>
             <a:endParaRPr lang="ru-RU"/>
           </a:p>
@@ -2908,7 +2915,7 @@
           <a:p>
             <a:fld id="{25FC0E31-009B-47AB-ABD1-AC671ABAD126}" type="datetimeFigureOut">
               <a:rPr lang="ru-RU" smtClean="0"/>
-              <a:t>12.09.2025</a:t>
+              <a:t>19.12.2025</a:t>
             </a:fld>
             <a:endParaRPr lang="ru-RU"/>
           </a:p>
@@ -3327,49 +3334,32 @@
       </p:grpSpPr>
       <p:pic>
         <p:nvPicPr>
-          <p:cNvPr id="1028" name="Picture 4" descr="Low-Cost IoT Air Quality Monitoring Station Using Cloud Platform and  Blockchain Technology">
-            <a:extLst>
-              <a:ext uri="{FF2B5EF4-FFF2-40B4-BE49-F238E27FC236}">
-                <a16:creationId xmlns:a16="http://schemas.microsoft.com/office/drawing/2014/main" id="{CAD26AC5-8D5D-4B4B-A3A0-04D7F6667C7F}"/>
+          <p:cNvPr id="2" name="Рисунок 1">
+            <a:extLst>
+              <a:ext uri="{FF2B5EF4-FFF2-40B4-BE49-F238E27FC236}">
+                <a16:creationId xmlns:a16="http://schemas.microsoft.com/office/drawing/2014/main" id="{1ADC2B19-0516-4480-8375-E533427C21C5}"/>
               </a:ext>
             </a:extLst>
           </p:cNvPr>
           <p:cNvPicPr>
-            <a:picLocks noChangeAspect="1" noChangeArrowheads="1"/>
+            <a:picLocks noChangeAspect="1"/>
           </p:cNvPicPr>
           <p:nvPr/>
         </p:nvPicPr>
         <p:blipFill>
-          <a:blip r:embed="rId2">
-            <a:extLst>
-              <a:ext uri="{28A0092B-C50C-407E-A947-70E740481C1C}">
-                <a14:useLocalDpi xmlns:a14="http://schemas.microsoft.com/office/drawing/2010/main" val="0"/>
-              </a:ext>
-            </a:extLst>
-          </a:blip>
-          <a:srcRect/>
+          <a:blip r:embed="rId2"/>
           <a:stretch>
             <a:fillRect/>
           </a:stretch>
         </p:blipFill>
-        <p:spPr bwMode="auto">
+        <p:spPr>
           <a:xfrm>
-            <a:off x="3138823" y="-2152"/>
-            <a:ext cx="9053177" cy="6860152"/>
+            <a:off x="0" y="0"/>
+            <a:ext cx="12192000" cy="6858000"/>
           </a:xfrm>
           <a:prstGeom prst="rect">
             <a:avLst/>
           </a:prstGeom>
-          <a:noFill/>
-          <a:extLst>
-            <a:ext uri="{909E8E84-426E-40DD-AFC4-6F175D3DCCD1}">
-              <a14:hiddenFill xmlns:a14="http://schemas.microsoft.com/office/drawing/2010/main">
-                <a:solidFill>
-                  <a:srgbClr val="FFFFFF"/>
-                </a:solidFill>
-              </a14:hiddenFill>
-            </a:ext>
-          </a:extLst>
         </p:spPr>
       </p:pic>
       <p:sp>
@@ -3390,23 +3380,31 @@
         </p:nvSpPr>
         <p:spPr>
           <a:xfrm>
-            <a:off x="0" y="365125"/>
-            <a:ext cx="3138823" cy="6224211"/>
+            <a:off x="0" y="5441577"/>
+            <a:ext cx="12192000" cy="1407458"/>
           </a:xfrm>
         </p:spPr>
         <p:txBody>
-          <a:bodyPr/>
+          <a:bodyPr>
+            <a:normAutofit/>
+          </a:bodyPr>
           <a:lstStyle/>
           <a:p>
             <a:pPr algn="ctr"/>
             <a:r>
               <a:rPr lang="en-US" dirty="0">
+                <a:highlight>
+                  <a:srgbClr val="C0C0C0"/>
+                </a:highlight>
                 <a:latin typeface="Times New Roman" panose="02020603050405020304" pitchFamily="18" charset="0"/>
                 <a:cs typeface="Times New Roman" panose="02020603050405020304" pitchFamily="18" charset="0"/>
               </a:rPr>
-              <a:t>Smart Air Pollution Monitoring System</a:t>
+              <a:t>Smart air pollution monitoring system</a:t>
             </a:r>
             <a:endParaRPr lang="ru-RU" dirty="0">
+              <a:highlight>
+                <a:srgbClr val="C0C0C0"/>
+              </a:highlight>
               <a:latin typeface="Times New Roman" panose="02020603050405020304" pitchFamily="18" charset="0"/>
               <a:cs typeface="Times New Roman" panose="02020603050405020304" pitchFamily="18" charset="0"/>
             </a:endParaRPr>
@@ -3427,6 +3425,385 @@
 </file>
 
 <file path=ppt/slides/slide2.xml><?xml version="1.0" encoding="utf-8"?>
+<p:sld xmlns:a="http://schemas.openxmlformats.org/drawingml/2006/main" xmlns:r="http://schemas.openxmlformats.org/officeDocument/2006/relationships" xmlns:p="http://schemas.openxmlformats.org/presentationml/2006/main">
+  <p:cSld>
+    <p:spTree>
+      <p:nvGrpSpPr>
+        <p:cNvPr id="1" name=""/>
+        <p:cNvGrpSpPr/>
+        <p:nvPr/>
+      </p:nvGrpSpPr>
+      <p:grpSpPr>
+        <a:xfrm>
+          <a:off x="0" y="0"/>
+          <a:ext cx="0" cy="0"/>
+          <a:chOff x="0" y="0"/>
+          <a:chExt cx="0" cy="0"/>
+        </a:xfrm>
+      </p:grpSpPr>
+      <p:sp>
+        <p:nvSpPr>
+          <p:cNvPr id="2" name="Заголовок 1">
+            <a:extLst>
+              <a:ext uri="{FF2B5EF4-FFF2-40B4-BE49-F238E27FC236}">
+                <a16:creationId xmlns:a16="http://schemas.microsoft.com/office/drawing/2014/main" id="{C7213F8E-8BBD-4455-95A8-AB145E819C4F}"/>
+              </a:ext>
+            </a:extLst>
+          </p:cNvPr>
+          <p:cNvSpPr>
+            <a:spLocks noGrp="1"/>
+          </p:cNvSpPr>
+          <p:nvPr>
+            <p:ph type="title"/>
+          </p:nvPr>
+        </p:nvSpPr>
+        <p:spPr/>
+        <p:txBody>
+          <a:bodyPr/>
+          <a:lstStyle/>
+          <a:p>
+            <a:pPr algn="ctr"/>
+            <a:r>
+              <a:rPr lang="en-US" dirty="0">
+                <a:latin typeface="Times New Roman" panose="02020603050405020304" pitchFamily="18" charset="0"/>
+                <a:cs typeface="Times New Roman" panose="02020603050405020304" pitchFamily="18" charset="0"/>
+              </a:rPr>
+              <a:t>Presentation plan</a:t>
+            </a:r>
+            <a:endParaRPr lang="ru-RU" dirty="0">
+              <a:latin typeface="Times New Roman" panose="02020603050405020304" pitchFamily="18" charset="0"/>
+              <a:cs typeface="Times New Roman" panose="02020603050405020304" pitchFamily="18" charset="0"/>
+            </a:endParaRPr>
+          </a:p>
+        </p:txBody>
+      </p:sp>
+      <p:sp>
+        <p:nvSpPr>
+          <p:cNvPr id="4" name="Объект 2">
+            <a:extLst>
+              <a:ext uri="{FF2B5EF4-FFF2-40B4-BE49-F238E27FC236}">
+                <a16:creationId xmlns:a16="http://schemas.microsoft.com/office/drawing/2014/main" id="{A78F5BCD-6AD5-4ED9-A77F-D13C9C51DC5F}"/>
+              </a:ext>
+            </a:extLst>
+          </p:cNvPr>
+          <p:cNvSpPr txBox="1">
+            <a:spLocks/>
+          </p:cNvSpPr>
+          <p:nvPr/>
+        </p:nvSpPr>
+        <p:spPr>
+          <a:xfrm>
+            <a:off x="3657600" y="2008093"/>
+            <a:ext cx="4598894" cy="4168869"/>
+          </a:xfrm>
+          <a:prstGeom prst="rect">
+            <a:avLst/>
+          </a:prstGeom>
+        </p:spPr>
+        <p:txBody>
+          <a:bodyPr>
+            <a:normAutofit fontScale="92500" lnSpcReduction="10000"/>
+          </a:bodyPr>
+          <a:lstStyle>
+            <a:lvl1pPr marL="228600" indent="-228600" algn="l" defTabSz="914400" rtl="0" eaLnBrk="1" latinLnBrk="0" hangingPunct="1">
+              <a:lnSpc>
+                <a:spcPct val="90000"/>
+              </a:lnSpc>
+              <a:spcBef>
+                <a:spcPts val="1000"/>
+              </a:spcBef>
+              <a:buFont typeface="Arial" panose="020B0604020202020204" pitchFamily="34" charset="0"/>
+              <a:buChar char="•"/>
+              <a:defRPr sz="2800" kern="1200">
+                <a:solidFill>
+                  <a:schemeClr val="tx1"/>
+                </a:solidFill>
+                <a:latin typeface="+mn-lt"/>
+                <a:ea typeface="+mn-ea"/>
+                <a:cs typeface="+mn-cs"/>
+              </a:defRPr>
+            </a:lvl1pPr>
+            <a:lvl2pPr marL="685800" indent="-228600" algn="l" defTabSz="914400" rtl="0" eaLnBrk="1" latinLnBrk="0" hangingPunct="1">
+              <a:lnSpc>
+                <a:spcPct val="90000"/>
+              </a:lnSpc>
+              <a:spcBef>
+                <a:spcPts val="500"/>
+              </a:spcBef>
+              <a:buFont typeface="Arial" panose="020B0604020202020204" pitchFamily="34" charset="0"/>
+              <a:buChar char="•"/>
+              <a:defRPr sz="2400" kern="1200">
+                <a:solidFill>
+                  <a:schemeClr val="tx1"/>
+                </a:solidFill>
+                <a:latin typeface="+mn-lt"/>
+                <a:ea typeface="+mn-ea"/>
+                <a:cs typeface="+mn-cs"/>
+              </a:defRPr>
+            </a:lvl2pPr>
+            <a:lvl3pPr marL="1143000" indent="-228600" algn="l" defTabSz="914400" rtl="0" eaLnBrk="1" latinLnBrk="0" hangingPunct="1">
+              <a:lnSpc>
+                <a:spcPct val="90000"/>
+              </a:lnSpc>
+              <a:spcBef>
+                <a:spcPts val="500"/>
+              </a:spcBef>
+              <a:buFont typeface="Arial" panose="020B0604020202020204" pitchFamily="34" charset="0"/>
+              <a:buChar char="•"/>
+              <a:defRPr sz="2000" kern="1200">
+                <a:solidFill>
+                  <a:schemeClr val="tx1"/>
+                </a:solidFill>
+                <a:latin typeface="+mn-lt"/>
+                <a:ea typeface="+mn-ea"/>
+                <a:cs typeface="+mn-cs"/>
+              </a:defRPr>
+            </a:lvl3pPr>
+            <a:lvl4pPr marL="1600200" indent="-228600" algn="l" defTabSz="914400" rtl="0" eaLnBrk="1" latinLnBrk="0" hangingPunct="1">
+              <a:lnSpc>
+                <a:spcPct val="90000"/>
+              </a:lnSpc>
+              <a:spcBef>
+                <a:spcPts val="500"/>
+              </a:spcBef>
+              <a:buFont typeface="Arial" panose="020B0604020202020204" pitchFamily="34" charset="0"/>
+              <a:buChar char="•"/>
+              <a:defRPr sz="1800" kern="1200">
+                <a:solidFill>
+                  <a:schemeClr val="tx1"/>
+                </a:solidFill>
+                <a:latin typeface="+mn-lt"/>
+                <a:ea typeface="+mn-ea"/>
+                <a:cs typeface="+mn-cs"/>
+              </a:defRPr>
+            </a:lvl4pPr>
+            <a:lvl5pPr marL="2057400" indent="-228600" algn="l" defTabSz="914400" rtl="0" eaLnBrk="1" latinLnBrk="0" hangingPunct="1">
+              <a:lnSpc>
+                <a:spcPct val="90000"/>
+              </a:lnSpc>
+              <a:spcBef>
+                <a:spcPts val="500"/>
+              </a:spcBef>
+              <a:buFont typeface="Arial" panose="020B0604020202020204" pitchFamily="34" charset="0"/>
+              <a:buChar char="•"/>
+              <a:defRPr sz="1800" kern="1200">
+                <a:solidFill>
+                  <a:schemeClr val="tx1"/>
+                </a:solidFill>
+                <a:latin typeface="+mn-lt"/>
+                <a:ea typeface="+mn-ea"/>
+                <a:cs typeface="+mn-cs"/>
+              </a:defRPr>
+            </a:lvl5pPr>
+            <a:lvl6pPr marL="2514600" indent="-228600" algn="l" defTabSz="914400" rtl="0" eaLnBrk="1" latinLnBrk="0" hangingPunct="1">
+              <a:lnSpc>
+                <a:spcPct val="90000"/>
+              </a:lnSpc>
+              <a:spcBef>
+                <a:spcPts val="500"/>
+              </a:spcBef>
+              <a:buFont typeface="Arial" panose="020B0604020202020204" pitchFamily="34" charset="0"/>
+              <a:buChar char="•"/>
+              <a:defRPr sz="1800" kern="1200">
+                <a:solidFill>
+                  <a:schemeClr val="tx1"/>
+                </a:solidFill>
+                <a:latin typeface="+mn-lt"/>
+                <a:ea typeface="+mn-ea"/>
+                <a:cs typeface="+mn-cs"/>
+              </a:defRPr>
+            </a:lvl6pPr>
+            <a:lvl7pPr marL="2971800" indent="-228600" algn="l" defTabSz="914400" rtl="0" eaLnBrk="1" latinLnBrk="0" hangingPunct="1">
+              <a:lnSpc>
+                <a:spcPct val="90000"/>
+              </a:lnSpc>
+              <a:spcBef>
+                <a:spcPts val="500"/>
+              </a:spcBef>
+              <a:buFont typeface="Arial" panose="020B0604020202020204" pitchFamily="34" charset="0"/>
+              <a:buChar char="•"/>
+              <a:defRPr sz="1800" kern="1200">
+                <a:solidFill>
+                  <a:schemeClr val="tx1"/>
+                </a:solidFill>
+                <a:latin typeface="+mn-lt"/>
+                <a:ea typeface="+mn-ea"/>
+                <a:cs typeface="+mn-cs"/>
+              </a:defRPr>
+            </a:lvl7pPr>
+            <a:lvl8pPr marL="3429000" indent="-228600" algn="l" defTabSz="914400" rtl="0" eaLnBrk="1" latinLnBrk="0" hangingPunct="1">
+              <a:lnSpc>
+                <a:spcPct val="90000"/>
+              </a:lnSpc>
+              <a:spcBef>
+                <a:spcPts val="500"/>
+              </a:spcBef>
+              <a:buFont typeface="Arial" panose="020B0604020202020204" pitchFamily="34" charset="0"/>
+              <a:buChar char="•"/>
+              <a:defRPr sz="1800" kern="1200">
+                <a:solidFill>
+                  <a:schemeClr val="tx1"/>
+                </a:solidFill>
+                <a:latin typeface="+mn-lt"/>
+                <a:ea typeface="+mn-ea"/>
+                <a:cs typeface="+mn-cs"/>
+              </a:defRPr>
+            </a:lvl8pPr>
+            <a:lvl9pPr marL="3886200" indent="-228600" algn="l" defTabSz="914400" rtl="0" eaLnBrk="1" latinLnBrk="0" hangingPunct="1">
+              <a:lnSpc>
+                <a:spcPct val="90000"/>
+              </a:lnSpc>
+              <a:spcBef>
+                <a:spcPts val="500"/>
+              </a:spcBef>
+              <a:buFont typeface="Arial" panose="020B0604020202020204" pitchFamily="34" charset="0"/>
+              <a:buChar char="•"/>
+              <a:defRPr sz="1800" kern="1200">
+                <a:solidFill>
+                  <a:schemeClr val="tx1"/>
+                </a:solidFill>
+                <a:latin typeface="+mn-lt"/>
+                <a:ea typeface="+mn-ea"/>
+                <a:cs typeface="+mn-cs"/>
+              </a:defRPr>
+            </a:lvl9pPr>
+          </a:lstStyle>
+          <a:p>
+            <a:pPr>
+              <a:lnSpc>
+                <a:spcPct val="250000"/>
+              </a:lnSpc>
+            </a:pPr>
+            <a:r>
+              <a:rPr lang="en-US" dirty="0">
+                <a:latin typeface="Times New Roman" panose="02020603050405020304" pitchFamily="18" charset="0"/>
+                <a:cs typeface="Times New Roman" panose="02020603050405020304" pitchFamily="18" charset="0"/>
+              </a:rPr>
+              <a:t>Map of pollution</a:t>
+            </a:r>
+          </a:p>
+          <a:p>
+            <a:pPr>
+              <a:lnSpc>
+                <a:spcPct val="250000"/>
+              </a:lnSpc>
+            </a:pPr>
+            <a:r>
+              <a:rPr lang="en-US" dirty="0">
+                <a:latin typeface="Times New Roman" panose="02020603050405020304" pitchFamily="18" charset="0"/>
+                <a:cs typeface="Times New Roman" panose="02020603050405020304" pitchFamily="18" charset="0"/>
+              </a:rPr>
+              <a:t>Types of pollution</a:t>
+            </a:r>
+          </a:p>
+          <a:p>
+            <a:pPr>
+              <a:lnSpc>
+                <a:spcPct val="250000"/>
+              </a:lnSpc>
+            </a:pPr>
+            <a:r>
+              <a:rPr lang="en-US" dirty="0">
+                <a:latin typeface="Times New Roman" panose="02020603050405020304" pitchFamily="18" charset="0"/>
+                <a:cs typeface="Times New Roman" panose="02020603050405020304" pitchFamily="18" charset="0"/>
+              </a:rPr>
+              <a:t>How does the system work?</a:t>
+            </a:r>
+          </a:p>
+          <a:p>
+            <a:pPr>
+              <a:lnSpc>
+                <a:spcPct val="250000"/>
+              </a:lnSpc>
+            </a:pPr>
+            <a:r>
+              <a:rPr lang="en-US" dirty="0">
+                <a:latin typeface="Times New Roman" panose="02020603050405020304" pitchFamily="18" charset="0"/>
+                <a:cs typeface="Times New Roman" panose="02020603050405020304" pitchFamily="18" charset="0"/>
+              </a:rPr>
+              <a:t>Conclusion</a:t>
+            </a:r>
+            <a:endParaRPr lang="ru-RU" dirty="0">
+              <a:latin typeface="Times New Roman" panose="02020603050405020304" pitchFamily="18" charset="0"/>
+              <a:cs typeface="Times New Roman" panose="02020603050405020304" pitchFamily="18" charset="0"/>
+            </a:endParaRPr>
+          </a:p>
+        </p:txBody>
+      </p:sp>
+      <p:pic>
+        <p:nvPicPr>
+          <p:cNvPr id="3" name="Рисунок 2">
+            <a:extLst>
+              <a:ext uri="{FF2B5EF4-FFF2-40B4-BE49-F238E27FC236}">
+                <a16:creationId xmlns:a16="http://schemas.microsoft.com/office/drawing/2014/main" id="{C88DF9A4-8532-4F72-ABCE-B8E924282A57}"/>
+              </a:ext>
+            </a:extLst>
+          </p:cNvPr>
+          <p:cNvPicPr>
+            <a:picLocks noChangeAspect="1"/>
+          </p:cNvPicPr>
+          <p:nvPr/>
+        </p:nvPicPr>
+        <p:blipFill>
+          <a:blip r:embed="rId2"/>
+          <a:stretch>
+            <a:fillRect/>
+          </a:stretch>
+        </p:blipFill>
+        <p:spPr>
+          <a:xfrm>
+            <a:off x="9316800" y="1690688"/>
+            <a:ext cx="2037000" cy="1800000"/>
+          </a:xfrm>
+          <a:prstGeom prst="rect">
+            <a:avLst/>
+          </a:prstGeom>
+        </p:spPr>
+      </p:pic>
+      <p:pic>
+        <p:nvPicPr>
+          <p:cNvPr id="5" name="Рисунок 4">
+            <a:extLst>
+              <a:ext uri="{FF2B5EF4-FFF2-40B4-BE49-F238E27FC236}">
+                <a16:creationId xmlns:a16="http://schemas.microsoft.com/office/drawing/2014/main" id="{518698D2-5046-467E-8C11-12EFD6A04B30}"/>
+              </a:ext>
+            </a:extLst>
+          </p:cNvPr>
+          <p:cNvPicPr>
+            <a:picLocks noChangeAspect="1"/>
+          </p:cNvPicPr>
+          <p:nvPr/>
+        </p:nvPicPr>
+        <p:blipFill>
+          <a:blip r:embed="rId3"/>
+          <a:stretch>
+            <a:fillRect/>
+          </a:stretch>
+        </p:blipFill>
+        <p:spPr>
+          <a:xfrm>
+            <a:off x="838200" y="4376962"/>
+            <a:ext cx="1539474" cy="1800000"/>
+          </a:xfrm>
+          <a:prstGeom prst="rect">
+            <a:avLst/>
+          </a:prstGeom>
+        </p:spPr>
+      </p:pic>
+    </p:spTree>
+    <p:extLst>
+      <p:ext uri="{BB962C8B-B14F-4D97-AF65-F5344CB8AC3E}">
+        <p14:creationId xmlns:p14="http://schemas.microsoft.com/office/powerpoint/2010/main" val="1839056504"/>
+      </p:ext>
+    </p:extLst>
+  </p:cSld>
+  <p:clrMapOvr>
+    <a:masterClrMapping/>
+  </p:clrMapOvr>
+</p:sld>
+</file>
+
+<file path=ppt/slides/slide3.xml><?xml version="1.0" encoding="utf-8"?>
 <p:sld xmlns:a="http://schemas.openxmlformats.org/drawingml/2006/main" xmlns:r="http://schemas.openxmlformats.org/officeDocument/2006/relationships" xmlns:p="http://schemas.openxmlformats.org/presentationml/2006/main">
   <p:cSld>
     <p:spTree>
@@ -3529,7 +3906,7 @@
 </p:sld>
 </file>
 
-<file path=ppt/slides/slide3.xml><?xml version="1.0" encoding="utf-8"?>
+<file path=ppt/slides/slide4.xml><?xml version="1.0" encoding="utf-8"?>
 <p:sld xmlns:a="http://schemas.openxmlformats.org/drawingml/2006/main" xmlns:r="http://schemas.openxmlformats.org/officeDocument/2006/relationships" xmlns:p="http://schemas.openxmlformats.org/presentationml/2006/main">
   <p:cSld>
     <p:spTree>
@@ -3848,7 +4225,7 @@
 </p:sld>
 </file>
 
-<file path=ppt/slides/slide4.xml><?xml version="1.0" encoding="utf-8"?>
+<file path=ppt/slides/slide5.xml><?xml version="1.0" encoding="utf-8"?>
 <p:sld xmlns:a="http://schemas.openxmlformats.org/drawingml/2006/main" xmlns:r="http://schemas.openxmlformats.org/officeDocument/2006/relationships" xmlns:p="http://schemas.openxmlformats.org/presentationml/2006/main">
   <p:cSld>
     <p:spTree>
@@ -3974,7 +4351,103 @@
 </p:sld>
 </file>
 
-<file path=ppt/slides/slide5.xml><?xml version="1.0" encoding="utf-8"?>
+<file path=ppt/slides/slide6.xml><?xml version="1.0" encoding="utf-8"?>
+<p:sld xmlns:a="http://schemas.openxmlformats.org/drawingml/2006/main" xmlns:r="http://schemas.openxmlformats.org/officeDocument/2006/relationships" xmlns:p="http://schemas.openxmlformats.org/presentationml/2006/main">
+  <p:cSld>
+    <p:spTree>
+      <p:nvGrpSpPr>
+        <p:cNvPr id="1" name=""/>
+        <p:cNvGrpSpPr/>
+        <p:nvPr/>
+      </p:nvGrpSpPr>
+      <p:grpSpPr>
+        <a:xfrm>
+          <a:off x="0" y="0"/>
+          <a:ext cx="0" cy="0"/>
+          <a:chOff x="0" y="0"/>
+          <a:chExt cx="0" cy="0"/>
+        </a:xfrm>
+      </p:grpSpPr>
+      <p:sp>
+        <p:nvSpPr>
+          <p:cNvPr id="2" name="Заголовок 1">
+            <a:extLst>
+              <a:ext uri="{FF2B5EF4-FFF2-40B4-BE49-F238E27FC236}">
+                <a16:creationId xmlns:a16="http://schemas.microsoft.com/office/drawing/2014/main" id="{C7213F8E-8BBD-4455-95A8-AB145E819C4F}"/>
+              </a:ext>
+            </a:extLst>
+          </p:cNvPr>
+          <p:cNvSpPr>
+            <a:spLocks noGrp="1"/>
+          </p:cNvSpPr>
+          <p:nvPr>
+            <p:ph type="title"/>
+          </p:nvPr>
+        </p:nvSpPr>
+        <p:spPr/>
+        <p:txBody>
+          <a:bodyPr/>
+          <a:lstStyle/>
+          <a:p>
+            <a:pPr algn="ctr"/>
+            <a:r>
+              <a:rPr lang="en-US" dirty="0">
+                <a:latin typeface="Times New Roman" panose="02020603050405020304" pitchFamily="18" charset="0"/>
+                <a:cs typeface="Times New Roman" panose="02020603050405020304" pitchFamily="18" charset="0"/>
+              </a:rPr>
+              <a:t>Conclusion</a:t>
+            </a:r>
+            <a:endParaRPr lang="ru-RU" dirty="0">
+              <a:latin typeface="Times New Roman" panose="02020603050405020304" pitchFamily="18" charset="0"/>
+              <a:cs typeface="Times New Roman" panose="02020603050405020304" pitchFamily="18" charset="0"/>
+            </a:endParaRPr>
+          </a:p>
+        </p:txBody>
+      </p:sp>
+      <p:pic>
+        <p:nvPicPr>
+          <p:cNvPr id="7" name="Рисунок 6">
+            <a:extLst>
+              <a:ext uri="{FF2B5EF4-FFF2-40B4-BE49-F238E27FC236}">
+                <a16:creationId xmlns:a16="http://schemas.microsoft.com/office/drawing/2014/main" id="{DC08AC46-B34D-4422-AB99-5058A44E6A1B}"/>
+              </a:ext>
+            </a:extLst>
+          </p:cNvPr>
+          <p:cNvPicPr>
+            <a:picLocks noChangeAspect="1"/>
+          </p:cNvPicPr>
+          <p:nvPr/>
+        </p:nvPicPr>
+        <p:blipFill>
+          <a:blip r:embed="rId2"/>
+          <a:stretch>
+            <a:fillRect/>
+          </a:stretch>
+        </p:blipFill>
+        <p:spPr>
+          <a:xfrm>
+            <a:off x="1761600" y="1690688"/>
+            <a:ext cx="8668800" cy="5040000"/>
+          </a:xfrm>
+          <a:prstGeom prst="rect">
+            <a:avLst/>
+          </a:prstGeom>
+        </p:spPr>
+      </p:pic>
+    </p:spTree>
+    <p:extLst>
+      <p:ext uri="{BB962C8B-B14F-4D97-AF65-F5344CB8AC3E}">
+        <p14:creationId xmlns:p14="http://schemas.microsoft.com/office/powerpoint/2010/main" val="2854849279"/>
+      </p:ext>
+    </p:extLst>
+  </p:cSld>
+  <p:clrMapOvr>
+    <a:masterClrMapping/>
+  </p:clrMapOvr>
+</p:sld>
+</file>
+
+<file path=ppt/slides/slide7.xml><?xml version="1.0" encoding="utf-8"?>
 <p:sld xmlns:a="http://schemas.openxmlformats.org/drawingml/2006/main" xmlns:r="http://schemas.openxmlformats.org/officeDocument/2006/relationships" xmlns:p="http://schemas.openxmlformats.org/presentationml/2006/main">
   <p:cSld>
     <p:spTree>
